--- a/docs/Report_M.pptx
+++ b/docs/Report_M.pptx
@@ -243,7 +243,7 @@
           <a:p>
             <a:fld id="{643FB994-8C7A-432F-9145-2B89982E5304}" type="datetimeFigureOut">
               <a:rPr lang="zh-TW" altLang="en-US" smtClean="0"/>
-              <a:t>2026/5/10</a:t>
+              <a:t>2026/5/11</a:t>
             </a:fld>
             <a:endParaRPr lang="zh-TW" altLang="en-US"/>
           </a:p>
@@ -413,7 +413,7 @@
           <a:p>
             <a:fld id="{643FB994-8C7A-432F-9145-2B89982E5304}" type="datetimeFigureOut">
               <a:rPr lang="zh-TW" altLang="en-US" smtClean="0"/>
-              <a:t>2026/5/10</a:t>
+              <a:t>2026/5/11</a:t>
             </a:fld>
             <a:endParaRPr lang="zh-TW" altLang="en-US"/>
           </a:p>
@@ -593,7 +593,7 @@
           <a:p>
             <a:fld id="{643FB994-8C7A-432F-9145-2B89982E5304}" type="datetimeFigureOut">
               <a:rPr lang="zh-TW" altLang="en-US" smtClean="0"/>
-              <a:t>2026/5/10</a:t>
+              <a:t>2026/5/11</a:t>
             </a:fld>
             <a:endParaRPr lang="zh-TW" altLang="en-US"/>
           </a:p>
@@ -763,7 +763,7 @@
           <a:p>
             <a:fld id="{643FB994-8C7A-432F-9145-2B89982E5304}" type="datetimeFigureOut">
               <a:rPr lang="zh-TW" altLang="en-US" smtClean="0"/>
-              <a:t>2026/5/10</a:t>
+              <a:t>2026/5/11</a:t>
             </a:fld>
             <a:endParaRPr lang="zh-TW" altLang="en-US"/>
           </a:p>
@@ -1009,7 +1009,7 @@
           <a:p>
             <a:fld id="{643FB994-8C7A-432F-9145-2B89982E5304}" type="datetimeFigureOut">
               <a:rPr lang="zh-TW" altLang="en-US" smtClean="0"/>
-              <a:t>2026/5/10</a:t>
+              <a:t>2026/5/11</a:t>
             </a:fld>
             <a:endParaRPr lang="zh-TW" altLang="en-US"/>
           </a:p>
@@ -1241,7 +1241,7 @@
           <a:p>
             <a:fld id="{643FB994-8C7A-432F-9145-2B89982E5304}" type="datetimeFigureOut">
               <a:rPr lang="zh-TW" altLang="en-US" smtClean="0"/>
-              <a:t>2026/5/10</a:t>
+              <a:t>2026/5/11</a:t>
             </a:fld>
             <a:endParaRPr lang="zh-TW" altLang="en-US"/>
           </a:p>
@@ -1608,7 +1608,7 @@
           <a:p>
             <a:fld id="{643FB994-8C7A-432F-9145-2B89982E5304}" type="datetimeFigureOut">
               <a:rPr lang="zh-TW" altLang="en-US" smtClean="0"/>
-              <a:t>2026/5/10</a:t>
+              <a:t>2026/5/11</a:t>
             </a:fld>
             <a:endParaRPr lang="zh-TW" altLang="en-US"/>
           </a:p>
@@ -1726,7 +1726,7 @@
           <a:p>
             <a:fld id="{643FB994-8C7A-432F-9145-2B89982E5304}" type="datetimeFigureOut">
               <a:rPr lang="zh-TW" altLang="en-US" smtClean="0"/>
-              <a:t>2026/5/10</a:t>
+              <a:t>2026/5/11</a:t>
             </a:fld>
             <a:endParaRPr lang="zh-TW" altLang="en-US"/>
           </a:p>
@@ -1821,7 +1821,7 @@
           <a:p>
             <a:fld id="{643FB994-8C7A-432F-9145-2B89982E5304}" type="datetimeFigureOut">
               <a:rPr lang="zh-TW" altLang="en-US" smtClean="0"/>
-              <a:t>2026/5/10</a:t>
+              <a:t>2026/5/11</a:t>
             </a:fld>
             <a:endParaRPr lang="zh-TW" altLang="en-US"/>
           </a:p>
@@ -2098,7 +2098,7 @@
           <a:p>
             <a:fld id="{643FB994-8C7A-432F-9145-2B89982E5304}" type="datetimeFigureOut">
               <a:rPr lang="zh-TW" altLang="en-US" smtClean="0"/>
-              <a:t>2026/5/10</a:t>
+              <a:t>2026/5/11</a:t>
             </a:fld>
             <a:endParaRPr lang="zh-TW" altLang="en-US"/>
           </a:p>
@@ -2355,7 +2355,7 @@
           <a:p>
             <a:fld id="{643FB994-8C7A-432F-9145-2B89982E5304}" type="datetimeFigureOut">
               <a:rPr lang="zh-TW" altLang="en-US" smtClean="0"/>
-              <a:t>2026/5/10</a:t>
+              <a:t>2026/5/11</a:t>
             </a:fld>
             <a:endParaRPr lang="zh-TW" altLang="en-US"/>
           </a:p>
@@ -2568,7 +2568,7 @@
           <a:p>
             <a:fld id="{643FB994-8C7A-432F-9145-2B89982E5304}" type="datetimeFigureOut">
               <a:rPr lang="zh-TW" altLang="en-US" smtClean="0"/>
-              <a:t>2026/5/10</a:t>
+              <a:t>2026/5/11</a:t>
             </a:fld>
             <a:endParaRPr lang="zh-TW" altLang="en-US"/>
           </a:p>
@@ -9285,8 +9285,8 @@
           </p:nvSpPr>
           <p:spPr>
             <a:xfrm>
-              <a:off x="922432" y="19810564"/>
-              <a:ext cx="8942872" cy="2994537"/>
+              <a:off x="922432" y="19668820"/>
+              <a:ext cx="8942872" cy="3866319"/>
             </a:xfrm>
             <a:prstGeom prst="rect">
               <a:avLst/>
@@ -9304,7 +9304,26 @@
                   <a:latin typeface="Times New Roman" panose="02020603050405020304" pitchFamily="18" charset="0"/>
                   <a:cs typeface="Times New Roman" panose="02020603050405020304" pitchFamily="18" charset="0"/>
                 </a:rPr>
-                <a:t>This section aims to establish a high-capacity uplink between the Cluster Head UAV and a fast-moving LEO satellite, the backhaul bottleneck of the entire SAGIN.</a:t>
+                <a:t>Goal</a:t>
+              </a:r>
+            </a:p>
+            <a:p>
+              <a:pPr lvl="1"/>
+              <a:r>
+                <a:rPr lang="en-US" altLang="zh-TW" sz="2600" dirty="0">
+                  <a:latin typeface="Times New Roman" panose="02020603050405020304" pitchFamily="18" charset="0"/>
+                  <a:cs typeface="Times New Roman" panose="02020603050405020304" pitchFamily="18" charset="0"/>
+                </a:rPr>
+                <a:t>Establish high-capacity uplink between Cluster Head UAV and fast-moving LEO satellite</a:t>
+              </a:r>
+            </a:p>
+            <a:p>
+              <a:r>
+                <a:rPr lang="en-US" altLang="zh-TW" sz="2600" dirty="0">
+                  <a:latin typeface="Times New Roman" panose="02020603050405020304" pitchFamily="18" charset="0"/>
+                  <a:cs typeface="Times New Roman" panose="02020603050405020304" pitchFamily="18" charset="0"/>
+                </a:rPr>
+                <a:t>Method</a:t>
               </a:r>
             </a:p>
             <a:p>
@@ -9332,7 +9351,7 @@
                   <a:ea typeface="標楷體" panose="03000509000000000000" pitchFamily="65" charset="-120"/>
                   <a:cs typeface="Times New Roman" panose="02020603050405020304" pitchFamily="18" charset="0"/>
                 </a:rPr>
-                <a:t>Hybrid Beamforming Gain: Physical Model (Fig. 1)</a:t>
+                <a:t>Hybrid Beamforming Gain (Fig. 1)</a:t>
               </a:r>
             </a:p>
             <a:p>
@@ -9346,7 +9365,45 @@
                   <a:ea typeface="標楷體" panose="03000509000000000000" pitchFamily="65" charset="-120"/>
                   <a:cs typeface="Times New Roman" panose="02020603050405020304" pitchFamily="18" charset="0"/>
                 </a:rPr>
-                <a:t>SNR-Adaptive Rate Control: Recompute SNR from current geometry.</a:t>
+                <a:t>SNR-Adaptive Rate Control</a:t>
+              </a:r>
+            </a:p>
+            <a:p>
+              <a:r>
+                <a:rPr lang="en-US" altLang="zh-TW" sz="2600" dirty="0">
+                  <a:latin typeface="Times New Roman" panose="02020603050405020304" pitchFamily="18" charset="0"/>
+                  <a:ea typeface="標楷體" panose="03000509000000000000" pitchFamily="65" charset="-120"/>
+                  <a:cs typeface="Times New Roman" panose="02020603050405020304" pitchFamily="18" charset="0"/>
+                </a:rPr>
+                <a:t>Output</a:t>
+              </a:r>
+            </a:p>
+            <a:p>
+              <a:pPr marL="457200" indent="-457200">
+                <a:buFont typeface="Arial" panose="020B0604020202020204" pitchFamily="34" charset="0"/>
+                <a:buChar char="•"/>
+              </a:pPr>
+              <a:r>
+                <a:rPr lang="en-US" altLang="zh-TW" sz="2600" dirty="0">
+                  <a:latin typeface="Times New Roman" panose="02020603050405020304" pitchFamily="18" charset="0"/>
+                  <a:ea typeface="標楷體" panose="03000509000000000000" pitchFamily="65" charset="-120"/>
+                  <a:cs typeface="Times New Roman" panose="02020603050405020304" pitchFamily="18" charset="0"/>
+                </a:rPr>
+                <a:t>Link related data (e.g. SNR)</a:t>
+              </a:r>
+            </a:p>
+            <a:p>
+              <a:pPr marL="457200" indent="-457200">
+                <a:buFont typeface="Arial" panose="020B0604020202020204" pitchFamily="34" charset="0"/>
+                <a:buChar char="•"/>
+              </a:pPr>
+              <a:r>
+                <a:rPr lang="en-US" altLang="zh-TW" sz="2600" dirty="0">
+                  <a:latin typeface="Times New Roman" panose="02020603050405020304" pitchFamily="18" charset="0"/>
+                  <a:ea typeface="標楷體" panose="03000509000000000000" pitchFamily="65" charset="-120"/>
+                  <a:cs typeface="Times New Roman" panose="02020603050405020304" pitchFamily="18" charset="0"/>
+                </a:rPr>
+                <a:t>Visible time window</a:t>
               </a:r>
             </a:p>
           </p:txBody>

--- a/docs/Report_M.pptx
+++ b/docs/Report_M.pptx
@@ -2987,7 +2987,7 @@
         </p:nvGrpSpPr>
         <p:grpSpPr>
           <a:xfrm>
-            <a:off x="8643719" y="9893714"/>
+            <a:off x="9334253" y="9790839"/>
             <a:ext cx="2062650" cy="1527861"/>
             <a:chOff x="11169062" y="9292519"/>
             <a:chExt cx="2960539" cy="2124130"/>
@@ -3774,7 +3774,7 @@
         </p:blipFill>
         <p:spPr>
           <a:xfrm>
-            <a:off x="13341111" y="14426728"/>
+            <a:off x="13341111" y="15193650"/>
             <a:ext cx="7431380" cy="4954252"/>
           </a:xfrm>
           <a:prstGeom prst="rect">
@@ -3847,7 +3847,7 @@
         </p:nvSpPr>
         <p:spPr>
           <a:xfrm>
-            <a:off x="3833812" y="2626577"/>
+            <a:off x="3833812" y="2762045"/>
             <a:ext cx="13716000" cy="1200329"/>
           </a:xfrm>
           <a:prstGeom prst="rect">
@@ -3943,7 +3943,7 @@
         </p:nvSpPr>
         <p:spPr>
           <a:xfrm>
-            <a:off x="928687" y="3771487"/>
+            <a:off x="928687" y="4007463"/>
             <a:ext cx="19916775" cy="2462213"/>
           </a:xfrm>
           <a:prstGeom prst="rect">
@@ -4038,7 +4038,7 @@
         </p:nvSpPr>
         <p:spPr>
           <a:xfrm>
-            <a:off x="928685" y="5881125"/>
+            <a:off x="928685" y="6353077"/>
             <a:ext cx="19916775" cy="1692771"/>
           </a:xfrm>
           <a:prstGeom prst="rect">
@@ -4108,7 +4108,7 @@
         </p:blipFill>
         <p:spPr>
           <a:xfrm>
-            <a:off x="15841133" y="2168297"/>
+            <a:off x="15841133" y="2530247"/>
             <a:ext cx="5114925" cy="2088594"/>
           </a:xfrm>
           <a:prstGeom prst="rect">
@@ -4130,7 +4130,7 @@
         </p:nvSpPr>
         <p:spPr>
           <a:xfrm>
-            <a:off x="928685" y="7519166"/>
+            <a:off x="928685" y="8286088"/>
             <a:ext cx="19916775" cy="707886"/>
           </a:xfrm>
           <a:prstGeom prst="rect">
@@ -4177,7 +4177,7 @@
         </p:nvGrpSpPr>
         <p:grpSpPr>
           <a:xfrm>
-            <a:off x="504892" y="8280146"/>
+            <a:off x="504892" y="9047068"/>
             <a:ext cx="12456348" cy="5310686"/>
             <a:chOff x="878876" y="9572006"/>
             <a:chExt cx="7022109" cy="4450556"/>
@@ -4299,8 +4299,8 @@
         </p:nvGrpSpPr>
         <p:grpSpPr>
           <a:xfrm>
-            <a:off x="13222786" y="8280145"/>
-            <a:ext cx="7638690" cy="16636924"/>
+            <a:off x="13222786" y="9047067"/>
+            <a:ext cx="7621321" cy="16636924"/>
             <a:chOff x="928686" y="9588372"/>
             <a:chExt cx="6980591" cy="4434809"/>
           </a:xfrm>
@@ -4437,7 +4437,7 @@
         </p:nvSpPr>
         <p:spPr>
           <a:xfrm>
-            <a:off x="593247" y="24919015"/>
+            <a:off x="593247" y="26162993"/>
             <a:ext cx="19916775" cy="2677656"/>
           </a:xfrm>
           <a:prstGeom prst="rect">
@@ -4526,7 +4526,7 @@
         </p:nvGrpSpPr>
         <p:grpSpPr>
           <a:xfrm>
-            <a:off x="13702021" y="9307052"/>
+            <a:off x="13702021" y="10073974"/>
             <a:ext cx="6384302" cy="4283780"/>
             <a:chOff x="15061783" y="10389315"/>
             <a:chExt cx="5430507" cy="3413269"/>
@@ -4546,10 +4546,10 @@
           </p:nvGrpSpPr>
           <p:grpSpPr>
             <a:xfrm>
-              <a:off x="15061783" y="10580362"/>
-              <a:ext cx="2335001" cy="3105962"/>
-              <a:chOff x="15208856" y="10797931"/>
-              <a:chExt cx="2335001" cy="3105962"/>
+              <a:off x="15061783" y="10580363"/>
+              <a:ext cx="2335001" cy="3105961"/>
+              <a:chOff x="15208856" y="10797932"/>
+              <a:chExt cx="2335001" cy="3105961"/>
             </a:xfrm>
           </p:grpSpPr>
           <p:grpSp>
@@ -4566,10 +4566,10 @@
             </p:nvGrpSpPr>
             <p:grpSpPr>
               <a:xfrm>
-                <a:off x="15298778" y="10797931"/>
-                <a:ext cx="2245079" cy="3105962"/>
-                <a:chOff x="15237042" y="10392350"/>
-                <a:chExt cx="2245079" cy="3105962"/>
+                <a:off x="15298778" y="10797932"/>
+                <a:ext cx="2245079" cy="3105961"/>
+                <a:chOff x="15237042" y="10392351"/>
+                <a:chExt cx="2245079" cy="3105961"/>
               </a:xfrm>
             </p:grpSpPr>
             <p:pic>
@@ -4593,8 +4593,8 @@
               </p:blipFill>
               <p:spPr>
                 <a:xfrm>
-                  <a:off x="16410024" y="10392350"/>
-                  <a:ext cx="469662" cy="503828"/>
+                  <a:off x="16392788" y="10392351"/>
+                  <a:ext cx="486898" cy="482602"/>
                 </a:xfrm>
                 <a:prstGeom prst="rect">
                   <a:avLst/>
@@ -7134,7 +7134,7 @@
             <p:spPr>
               <a:xfrm>
                 <a:off x="15208856" y="11452059"/>
-                <a:ext cx="1069137" cy="369332"/>
+                <a:ext cx="1069137" cy="294280"/>
               </a:xfrm>
               <a:prstGeom prst="rect">
                 <a:avLst/>
@@ -7148,10 +7148,16 @@
               <a:lstStyle/>
               <a:p>
                 <a:r>
-                  <a:rPr lang="en-US" altLang="zh-TW" b="1" dirty="0"/>
+                  <a:rPr lang="en-US" altLang="zh-TW" b="1" dirty="0">
+                    <a:latin typeface="Times New Roman" panose="02020603050405020304" pitchFamily="18" charset="0"/>
+                    <a:cs typeface="Times New Roman" panose="02020603050405020304" pitchFamily="18" charset="0"/>
+                  </a:rPr>
                   <a:t>Fleet</a:t>
                 </a:r>
-                <a:endParaRPr lang="zh-TW" altLang="en-US" b="1" dirty="0"/>
+                <a:endParaRPr lang="zh-TW" altLang="en-US" b="1" dirty="0">
+                  <a:latin typeface="Times New Roman" panose="02020603050405020304" pitchFamily="18" charset="0"/>
+                  <a:cs typeface="Times New Roman" panose="02020603050405020304" pitchFamily="18" charset="0"/>
+                </a:endParaRPr>
               </a:p>
             </p:txBody>
           </p:sp>
@@ -7191,9 +7197,9 @@
             <p:grpSpPr>
               <a:xfrm>
                 <a:off x="19052965" y="11403788"/>
-                <a:ext cx="914980" cy="675061"/>
+                <a:ext cx="914980" cy="606263"/>
                 <a:chOff x="17930179" y="13367954"/>
-                <a:chExt cx="914980" cy="675061"/>
+                <a:chExt cx="914980" cy="606263"/>
               </a:xfrm>
             </p:grpSpPr>
             <p:pic>
@@ -7246,7 +7252,7 @@
               <p:spPr>
                 <a:xfrm>
                   <a:off x="18011199" y="13704461"/>
-                  <a:ext cx="833960" cy="338554"/>
+                  <a:ext cx="833960" cy="269756"/>
                 </a:xfrm>
                 <a:prstGeom prst="rect">
                   <a:avLst/>
@@ -7260,10 +7266,16 @@
                 <a:lstStyle/>
                 <a:p>
                   <a:r>
-                    <a:rPr lang="en-US" altLang="zh-TW" sz="1600" dirty="0"/>
+                    <a:rPr lang="en-US" altLang="zh-TW" sz="1600" dirty="0">
+                      <a:latin typeface="Times New Roman" panose="02020603050405020304" pitchFamily="18" charset="0"/>
+                      <a:cs typeface="Times New Roman" panose="02020603050405020304" pitchFamily="18" charset="0"/>
+                    </a:rPr>
                     <a:t>Master</a:t>
                   </a:r>
-                  <a:endParaRPr lang="zh-TW" altLang="en-US" sz="1600" dirty="0"/>
+                  <a:endParaRPr lang="zh-TW" altLang="en-US" sz="1600" dirty="0">
+                    <a:latin typeface="Times New Roman" panose="02020603050405020304" pitchFamily="18" charset="0"/>
+                    <a:cs typeface="Times New Roman" panose="02020603050405020304" pitchFamily="18" charset="0"/>
+                  </a:endParaRPr>
                 </a:p>
               </p:txBody>
             </p:sp>
@@ -7283,9 +7295,9 @@
             <p:grpSpPr>
               <a:xfrm>
                 <a:off x="18205594" y="12235074"/>
-                <a:ext cx="833960" cy="747004"/>
+                <a:ext cx="833960" cy="678206"/>
                 <a:chOff x="18262261" y="12232352"/>
-                <a:chExt cx="833960" cy="747004"/>
+                <a:chExt cx="833960" cy="678206"/>
               </a:xfrm>
             </p:grpSpPr>
             <p:pic>
@@ -7338,7 +7350,7 @@
               <p:spPr>
                 <a:xfrm>
                   <a:off x="18382837" y="12640802"/>
-                  <a:ext cx="695691" cy="338554"/>
+                  <a:ext cx="695691" cy="269756"/>
                 </a:xfrm>
                 <a:prstGeom prst="rect">
                   <a:avLst/>
@@ -7352,10 +7364,16 @@
                 <a:lstStyle/>
                 <a:p>
                   <a:r>
-                    <a:rPr lang="en-US" altLang="zh-TW" sz="1600" dirty="0"/>
+                    <a:rPr lang="en-US" altLang="zh-TW" sz="1600" dirty="0">
+                      <a:latin typeface="Times New Roman" panose="02020603050405020304" pitchFamily="18" charset="0"/>
+                      <a:cs typeface="Times New Roman" panose="02020603050405020304" pitchFamily="18" charset="0"/>
+                    </a:rPr>
                     <a:t>Slave</a:t>
                   </a:r>
-                  <a:endParaRPr lang="zh-TW" altLang="en-US" sz="1600" dirty="0"/>
+                  <a:endParaRPr lang="zh-TW" altLang="en-US" sz="1600" dirty="0">
+                    <a:latin typeface="Times New Roman" panose="02020603050405020304" pitchFamily="18" charset="0"/>
+                    <a:cs typeface="Times New Roman" panose="02020603050405020304" pitchFamily="18" charset="0"/>
+                  </a:endParaRPr>
                 </a:p>
               </p:txBody>
             </p:sp>
@@ -7375,9 +7393,9 @@
             <p:grpSpPr>
               <a:xfrm>
                 <a:off x="19052965" y="12369168"/>
-                <a:ext cx="833960" cy="747005"/>
+                <a:ext cx="833960" cy="678207"/>
                 <a:chOff x="18262261" y="12232351"/>
-                <a:chExt cx="833960" cy="747005"/>
+                <a:chExt cx="833960" cy="678207"/>
               </a:xfrm>
             </p:grpSpPr>
             <p:pic>
@@ -7430,7 +7448,7 @@
               <p:spPr>
                 <a:xfrm>
                   <a:off x="18382837" y="12640802"/>
-                  <a:ext cx="695691" cy="338554"/>
+                  <a:ext cx="695691" cy="269756"/>
                 </a:xfrm>
                 <a:prstGeom prst="rect">
                   <a:avLst/>
@@ -7444,10 +7462,16 @@
                 <a:lstStyle/>
                 <a:p>
                   <a:r>
-                    <a:rPr lang="en-US" altLang="zh-TW" sz="1600" dirty="0"/>
+                    <a:rPr lang="en-US" altLang="zh-TW" sz="1600" dirty="0">
+                      <a:latin typeface="Times New Roman" panose="02020603050405020304" pitchFamily="18" charset="0"/>
+                      <a:cs typeface="Times New Roman" panose="02020603050405020304" pitchFamily="18" charset="0"/>
+                    </a:rPr>
                     <a:t>Slave</a:t>
                   </a:r>
-                  <a:endParaRPr lang="zh-TW" altLang="en-US" sz="1600" dirty="0"/>
+                  <a:endParaRPr lang="zh-TW" altLang="en-US" sz="1600" dirty="0">
+                    <a:latin typeface="Times New Roman" panose="02020603050405020304" pitchFamily="18" charset="0"/>
+                    <a:cs typeface="Times New Roman" panose="02020603050405020304" pitchFamily="18" charset="0"/>
+                  </a:endParaRPr>
                 </a:p>
               </p:txBody>
             </p:sp>
@@ -7467,9 +7491,9 @@
             <p:grpSpPr>
               <a:xfrm>
                 <a:off x="19836020" y="12267299"/>
-                <a:ext cx="833960" cy="747005"/>
+                <a:ext cx="833960" cy="678207"/>
                 <a:chOff x="18262261" y="12232351"/>
-                <a:chExt cx="833960" cy="747005"/>
+                <a:chExt cx="833960" cy="678207"/>
               </a:xfrm>
             </p:grpSpPr>
             <p:pic>
@@ -7522,7 +7546,7 @@
               <p:spPr>
                 <a:xfrm>
                   <a:off x="18399041" y="12640802"/>
-                  <a:ext cx="695691" cy="338554"/>
+                  <a:ext cx="695691" cy="269756"/>
                 </a:xfrm>
                 <a:prstGeom prst="rect">
                   <a:avLst/>
@@ -7536,10 +7560,16 @@
                 <a:lstStyle/>
                 <a:p>
                   <a:r>
-                    <a:rPr lang="en-US" altLang="zh-TW" sz="1600" dirty="0"/>
+                    <a:rPr lang="en-US" altLang="zh-TW" sz="1600" dirty="0">
+                      <a:latin typeface="Times New Roman" panose="02020603050405020304" pitchFamily="18" charset="0"/>
+                      <a:cs typeface="Times New Roman" panose="02020603050405020304" pitchFamily="18" charset="0"/>
+                    </a:rPr>
                     <a:t>Slave</a:t>
                   </a:r>
-                  <a:endParaRPr lang="zh-TW" altLang="en-US" sz="1600" dirty="0"/>
+                  <a:endParaRPr lang="zh-TW" altLang="en-US" sz="1600" dirty="0">
+                    <a:latin typeface="Times New Roman" panose="02020603050405020304" pitchFamily="18" charset="0"/>
+                    <a:cs typeface="Times New Roman" panose="02020603050405020304" pitchFamily="18" charset="0"/>
+                  </a:endParaRPr>
                 </a:p>
               </p:txBody>
             </p:sp>
@@ -9107,7 +9137,7 @@
         </p:nvGrpSpPr>
         <p:grpSpPr>
           <a:xfrm>
-            <a:off x="516546" y="19304628"/>
+            <a:off x="516546" y="20071550"/>
             <a:ext cx="12356339" cy="5612439"/>
             <a:chOff x="543558" y="19097017"/>
             <a:chExt cx="13397921" cy="4829041"/>
@@ -9466,7 +9496,7 @@
         </p:nvSpPr>
         <p:spPr>
           <a:xfrm>
-            <a:off x="13663321" y="13628493"/>
+            <a:off x="13663321" y="14395415"/>
             <a:ext cx="6384302" cy="400110"/>
           </a:xfrm>
           <a:prstGeom prst="rect">
@@ -9482,10 +9512,16 @@
           <a:p>
             <a:pPr algn="ctr"/>
             <a:r>
-              <a:rPr lang="en-US" altLang="zh-TW" sz="2000" dirty="0"/>
+              <a:rPr lang="en-US" altLang="zh-TW" sz="2000" dirty="0">
+                <a:latin typeface="Times New Roman" panose="02020603050405020304" pitchFamily="18" charset="0"/>
+                <a:cs typeface="Times New Roman" panose="02020603050405020304" pitchFamily="18" charset="0"/>
+              </a:rPr>
               <a:t>Fig. 2: System Architecture</a:t>
             </a:r>
-            <a:endParaRPr lang="zh-TW" altLang="en-US" sz="2000" dirty="0"/>
+            <a:endParaRPr lang="zh-TW" altLang="en-US" sz="2000" dirty="0">
+              <a:latin typeface="Times New Roman" panose="02020603050405020304" pitchFamily="18" charset="0"/>
+              <a:cs typeface="Times New Roman" panose="02020603050405020304" pitchFamily="18" charset="0"/>
+            </a:endParaRPr>
           </a:p>
         </p:txBody>
       </p:sp>
@@ -9503,7 +9539,7 @@
         </p:nvSpPr>
         <p:spPr>
           <a:xfrm>
-            <a:off x="13663321" y="19393913"/>
+            <a:off x="13663321" y="20160835"/>
             <a:ext cx="6384302" cy="400110"/>
           </a:xfrm>
           <a:prstGeom prst="rect">
@@ -9519,10 +9555,16 @@
           <a:p>
             <a:pPr algn="ctr"/>
             <a:r>
-              <a:rPr lang="en-US" altLang="zh-TW" sz="2000" dirty="0"/>
+              <a:rPr lang="en-US" altLang="zh-TW" sz="2000" dirty="0">
+                <a:latin typeface="Times New Roman" panose="02020603050405020304" pitchFamily="18" charset="0"/>
+                <a:cs typeface="Times New Roman" panose="02020603050405020304" pitchFamily="18" charset="0"/>
+              </a:rPr>
               <a:t>Fig. 3: Data Flow</a:t>
             </a:r>
-            <a:endParaRPr lang="zh-TW" altLang="en-US" sz="2000" dirty="0"/>
+            <a:endParaRPr lang="zh-TW" altLang="en-US" sz="2000" dirty="0">
+              <a:latin typeface="Times New Roman" panose="02020603050405020304" pitchFamily="18" charset="0"/>
+              <a:cs typeface="Times New Roman" panose="02020603050405020304" pitchFamily="18" charset="0"/>
+            </a:endParaRPr>
           </a:p>
         </p:txBody>
       </p:sp>
@@ -9540,7 +9582,7 @@
         </p:nvSpPr>
         <p:spPr>
           <a:xfrm>
-            <a:off x="13604148" y="20025049"/>
+            <a:off x="13604148" y="20791971"/>
             <a:ext cx="6908916" cy="4093428"/>
           </a:xfrm>
           <a:prstGeom prst="rect">
@@ -9623,7 +9665,7 @@
         </p:nvCxnSpPr>
         <p:spPr>
           <a:xfrm>
-            <a:off x="12867107" y="22071763"/>
+            <a:off x="12867107" y="22838685"/>
             <a:ext cx="202941" cy="0"/>
           </a:xfrm>
           <a:prstGeom prst="line">
@@ -9666,7 +9708,7 @@
         </p:nvCxnSpPr>
         <p:spPr>
           <a:xfrm flipH="1" flipV="1">
-            <a:off x="13070048" y="18762184"/>
+            <a:off x="13070048" y="19529106"/>
             <a:ext cx="2563" cy="3309579"/>
           </a:xfrm>
           <a:prstGeom prst="line">
@@ -9709,7 +9751,7 @@
         </p:nvCxnSpPr>
         <p:spPr>
           <a:xfrm>
-            <a:off x="13057871" y="18762184"/>
+            <a:off x="13057871" y="19529106"/>
             <a:ext cx="2738461" cy="0"/>
           </a:xfrm>
           <a:prstGeom prst="straightConnector1">
@@ -9754,7 +9796,7 @@
         </p:nvCxnSpPr>
         <p:spPr>
           <a:xfrm>
-            <a:off x="12872885" y="10935489"/>
+            <a:off x="12872885" y="11702411"/>
             <a:ext cx="197163" cy="973"/>
           </a:xfrm>
           <a:prstGeom prst="line">
@@ -9797,7 +9839,7 @@
         </p:nvCxnSpPr>
         <p:spPr>
           <a:xfrm flipV="1">
-            <a:off x="13030119" y="10935489"/>
+            <a:off x="13030119" y="11702411"/>
             <a:ext cx="27752" cy="5365128"/>
           </a:xfrm>
           <a:prstGeom prst="line">
@@ -9840,7 +9882,7 @@
         </p:nvCxnSpPr>
         <p:spPr>
           <a:xfrm>
-            <a:off x="13024814" y="16300617"/>
+            <a:off x="13024814" y="17067539"/>
             <a:ext cx="473745" cy="0"/>
           </a:xfrm>
           <a:prstGeom prst="straightConnector1">
@@ -9882,7 +9924,7 @@
         </p:nvSpPr>
         <p:spPr>
           <a:xfrm>
-            <a:off x="760166" y="9060378"/>
+            <a:off x="760166" y="9827300"/>
             <a:ext cx="7880703" cy="4493538"/>
           </a:xfrm>
           <a:prstGeom prst="rect">
@@ -10048,14 +10090,14 @@
           <p:nvPr>
             <p:extLst>
               <p:ext uri="{D42A27DB-BD31-4B8C-83A1-F6EECF244321}">
-                <p14:modId xmlns:p14="http://schemas.microsoft.com/office/powerpoint/2010/main" val="9531965"/>
+                <p14:modId xmlns:p14="http://schemas.microsoft.com/office/powerpoint/2010/main" val="2400534750"/>
               </p:ext>
             </p:extLst>
           </p:nvPr>
         </p:nvGraphicFramePr>
         <p:xfrm>
-          <a:off x="6846716" y="11778155"/>
-          <a:ext cx="5745251" cy="1432560"/>
+          <a:off x="6370842" y="12265425"/>
+          <a:ext cx="6301463" cy="1432560"/>
         </p:xfrm>
         <a:graphic>
           <a:graphicData uri="http://schemas.openxmlformats.org/drawingml/2006/table">
@@ -10064,35 +10106,35 @@
                 <a:tableStyleId>{5940675A-B579-460E-94D1-54222C63F5DA}</a:tableStyleId>
               </a:tblPr>
               <a:tblGrid>
-                <a:gridCol w="793419">
+                <a:gridCol w="1276141">
                   <a:extLst>
                     <a:ext uri="{9D8B030D-6E8A-4147-A177-3AD203B41FA5}">
                       <a16:colId xmlns:a16="http://schemas.microsoft.com/office/drawing/2014/main" val="2868866752"/>
                     </a:ext>
                   </a:extLst>
                 </a:gridCol>
-                <a:gridCol w="1100549">
+                <a:gridCol w="934497">
                   <a:extLst>
                     <a:ext uri="{9D8B030D-6E8A-4147-A177-3AD203B41FA5}">
                       <a16:colId xmlns:a16="http://schemas.microsoft.com/office/drawing/2014/main" val="3278659831"/>
                     </a:ext>
                   </a:extLst>
                 </a:gridCol>
-                <a:gridCol w="895796">
+                <a:gridCol w="974690">
                   <a:extLst>
                     <a:ext uri="{9D8B030D-6E8A-4147-A177-3AD203B41FA5}">
                       <a16:colId xmlns:a16="http://schemas.microsoft.com/office/drawing/2014/main" val="3125416225"/>
                     </a:ext>
                   </a:extLst>
                 </a:gridCol>
-                <a:gridCol w="1292801">
+                <a:gridCol w="1286189">
                   <a:extLst>
                     <a:ext uri="{9D8B030D-6E8A-4147-A177-3AD203B41FA5}">
                       <a16:colId xmlns:a16="http://schemas.microsoft.com/office/drawing/2014/main" val="246851647"/>
                     </a:ext>
                   </a:extLst>
                 </a:gridCol>
-                <a:gridCol w="1662686">
+                <a:gridCol w="1829946">
                   <a:extLst>
                     <a:ext uri="{9D8B030D-6E8A-4147-A177-3AD203B41FA5}">
                       <a16:colId xmlns:a16="http://schemas.microsoft.com/office/drawing/2014/main" val="2378117280"/>
@@ -10110,7 +10152,10 @@
                         <a:buNone/>
                       </a:pPr>
                       <a:r>
-                        <a:rPr lang="en-US" sz="1400" dirty="0"/>
+                        <a:rPr lang="en-US" sz="1400" dirty="0">
+                          <a:latin typeface="Times New Roman" panose="02020603050405020304" pitchFamily="18" charset="0"/>
+                          <a:cs typeface="Times New Roman" panose="02020603050405020304" pitchFamily="18" charset="0"/>
+                        </a:rPr>
                         <a:t>Link</a:t>
                       </a:r>
                     </a:p>
@@ -10126,7 +10171,10 @@
                         <a:buNone/>
                       </a:pPr>
                       <a:r>
-                        <a:rPr lang="en-US" sz="1400" dirty="0"/>
+                        <a:rPr lang="en-US" sz="1400" dirty="0">
+                          <a:latin typeface="Times New Roman" panose="02020603050405020304" pitchFamily="18" charset="0"/>
+                          <a:cs typeface="Times New Roman" panose="02020603050405020304" pitchFamily="18" charset="0"/>
+                        </a:rPr>
                         <a:t>Distance (m)</a:t>
                       </a:r>
                     </a:p>
@@ -10142,7 +10190,10 @@
                         <a:buNone/>
                       </a:pPr>
                       <a:r>
-                        <a:rPr lang="en-US" sz="1400" dirty="0"/>
+                        <a:rPr lang="en-US" sz="1400" dirty="0">
+                          <a:latin typeface="Times New Roman" panose="02020603050405020304" pitchFamily="18" charset="0"/>
+                          <a:cs typeface="Times New Roman" panose="02020603050405020304" pitchFamily="18" charset="0"/>
+                        </a:rPr>
                         <a:t>SNR (dB)</a:t>
                       </a:r>
                     </a:p>
@@ -10158,7 +10209,10 @@
                         <a:buNone/>
                       </a:pPr>
                       <a:r>
-                        <a:rPr lang="en-US" sz="1400" dirty="0"/>
+                        <a:rPr lang="en-US" sz="1400" dirty="0">
+                          <a:latin typeface="Times New Roman" panose="02020603050405020304" pitchFamily="18" charset="0"/>
+                          <a:cs typeface="Times New Roman" panose="02020603050405020304" pitchFamily="18" charset="0"/>
+                        </a:rPr>
                         <a:t>Est. Rate (Mbps)</a:t>
                       </a:r>
                     </a:p>
@@ -10174,7 +10228,10 @@
                         <a:buNone/>
                       </a:pPr>
                       <a:r>
-                        <a:rPr lang="en-US" sz="1400" dirty="0"/>
+                        <a:rPr lang="en-US" sz="1400" dirty="0">
+                          <a:latin typeface="Times New Roman" panose="02020603050405020304" pitchFamily="18" charset="0"/>
+                          <a:cs typeface="Times New Roman" panose="02020603050405020304" pitchFamily="18" charset="0"/>
+                        </a:rPr>
                         <a:t>Eff. Throughput (Mbps)</a:t>
                       </a:r>
                     </a:p>
@@ -10197,7 +10254,10 @@
                         <a:buNone/>
                       </a:pPr>
                       <a:r>
-                        <a:rPr lang="en-US" sz="1400"/>
+                        <a:rPr lang="en-US" sz="1400">
+                          <a:latin typeface="Times New Roman" panose="02020603050405020304" pitchFamily="18" charset="0"/>
+                          <a:cs typeface="Times New Roman" panose="02020603050405020304" pitchFamily="18" charset="0"/>
+                        </a:rPr>
                         <a:t>S1 → M</a:t>
                       </a:r>
                     </a:p>
@@ -10213,7 +10273,10 @@
                         <a:buNone/>
                       </a:pPr>
                       <a:r>
-                        <a:rPr lang="en-US" altLang="zh-TW" sz="1400"/>
+                        <a:rPr lang="en-US" altLang="zh-TW" sz="1400" dirty="0">
+                          <a:latin typeface="Times New Roman" panose="02020603050405020304" pitchFamily="18" charset="0"/>
+                          <a:cs typeface="Times New Roman" panose="02020603050405020304" pitchFamily="18" charset="0"/>
+                        </a:rPr>
                         <a:t>120</a:t>
                       </a:r>
                     </a:p>
@@ -10229,7 +10292,10 @@
                         <a:buNone/>
                       </a:pPr>
                       <a:r>
-                        <a:rPr lang="en-US" altLang="zh-TW" sz="1400" dirty="0"/>
+                        <a:rPr lang="en-US" altLang="zh-TW" sz="1400" dirty="0">
+                          <a:latin typeface="Times New Roman" panose="02020603050405020304" pitchFamily="18" charset="0"/>
+                          <a:cs typeface="Times New Roman" panose="02020603050405020304" pitchFamily="18" charset="0"/>
+                        </a:rPr>
                         <a:t>18.4</a:t>
                       </a:r>
                     </a:p>
@@ -10245,7 +10311,10 @@
                         <a:buNone/>
                       </a:pPr>
                       <a:r>
-                        <a:rPr lang="en-US" altLang="zh-TW" sz="1400" dirty="0"/>
+                        <a:rPr lang="en-US" altLang="zh-TW" sz="1400" dirty="0">
+                          <a:latin typeface="Times New Roman" panose="02020603050405020304" pitchFamily="18" charset="0"/>
+                          <a:cs typeface="Times New Roman" panose="02020603050405020304" pitchFamily="18" charset="0"/>
+                        </a:rPr>
                         <a:t>34.2</a:t>
                       </a:r>
                     </a:p>
@@ -10261,7 +10330,10 @@
                         <a:buNone/>
                       </a:pPr>
                       <a:r>
-                        <a:rPr lang="en-US" altLang="zh-TW" sz="1400" dirty="0"/>
+                        <a:rPr lang="en-US" altLang="zh-TW" sz="1400" dirty="0">
+                          <a:latin typeface="Times New Roman" panose="02020603050405020304" pitchFamily="18" charset="0"/>
+                          <a:cs typeface="Times New Roman" panose="02020603050405020304" pitchFamily="18" charset="0"/>
+                        </a:rPr>
                         <a:t>28.7</a:t>
                       </a:r>
                     </a:p>
@@ -10284,7 +10356,10 @@
                         <a:buNone/>
                       </a:pPr>
                       <a:r>
-                        <a:rPr lang="en-US" sz="1400" dirty="0"/>
+                        <a:rPr lang="en-US" sz="1400" dirty="0">
+                          <a:latin typeface="Times New Roman" panose="02020603050405020304" pitchFamily="18" charset="0"/>
+                          <a:cs typeface="Times New Roman" panose="02020603050405020304" pitchFamily="18" charset="0"/>
+                        </a:rPr>
                         <a:t>S2 → M</a:t>
                       </a:r>
                     </a:p>
@@ -10300,7 +10375,10 @@
                         <a:buNone/>
                       </a:pPr>
                       <a:r>
-                        <a:rPr lang="en-US" altLang="zh-TW" sz="1400"/>
+                        <a:rPr lang="en-US" altLang="zh-TW" sz="1400">
+                          <a:latin typeface="Times New Roman" panose="02020603050405020304" pitchFamily="18" charset="0"/>
+                          <a:cs typeface="Times New Roman" panose="02020603050405020304" pitchFamily="18" charset="0"/>
+                        </a:rPr>
                         <a:t>175</a:t>
                       </a:r>
                     </a:p>
@@ -10316,7 +10394,10 @@
                         <a:buNone/>
                       </a:pPr>
                       <a:r>
-                        <a:rPr lang="en-US" altLang="zh-TW" sz="1400"/>
+                        <a:rPr lang="en-US" altLang="zh-TW" sz="1400">
+                          <a:latin typeface="Times New Roman" panose="02020603050405020304" pitchFamily="18" charset="0"/>
+                          <a:cs typeface="Times New Roman" panose="02020603050405020304" pitchFamily="18" charset="0"/>
+                        </a:rPr>
                         <a:t>14.1</a:t>
                       </a:r>
                     </a:p>
@@ -10332,7 +10413,10 @@
                         <a:buNone/>
                       </a:pPr>
                       <a:r>
-                        <a:rPr lang="en-US" altLang="zh-TW" sz="1400" dirty="0"/>
+                        <a:rPr lang="en-US" altLang="zh-TW" sz="1400" dirty="0">
+                          <a:latin typeface="Times New Roman" panose="02020603050405020304" pitchFamily="18" charset="0"/>
+                          <a:cs typeface="Times New Roman" panose="02020603050405020304" pitchFamily="18" charset="0"/>
+                        </a:rPr>
                         <a:t>24.9</a:t>
                       </a:r>
                     </a:p>
@@ -10348,7 +10432,10 @@
                         <a:buNone/>
                       </a:pPr>
                       <a:r>
-                        <a:rPr lang="en-US" altLang="zh-TW" sz="1400" dirty="0"/>
+                        <a:rPr lang="en-US" altLang="zh-TW" sz="1400" dirty="0">
+                          <a:latin typeface="Times New Roman" panose="02020603050405020304" pitchFamily="18" charset="0"/>
+                          <a:cs typeface="Times New Roman" panose="02020603050405020304" pitchFamily="18" charset="0"/>
+                        </a:rPr>
                         <a:t>20.3</a:t>
                       </a:r>
                     </a:p>
@@ -10371,7 +10458,10 @@
                         <a:buNone/>
                       </a:pPr>
                       <a:r>
-                        <a:rPr lang="en-US" sz="1400" dirty="0"/>
+                        <a:rPr lang="en-US" sz="1400" dirty="0">
+                          <a:latin typeface="Times New Roman" panose="02020603050405020304" pitchFamily="18" charset="0"/>
+                          <a:cs typeface="Times New Roman" panose="02020603050405020304" pitchFamily="18" charset="0"/>
+                        </a:rPr>
                         <a:t>S3 → M</a:t>
                       </a:r>
                     </a:p>
@@ -10387,7 +10477,10 @@
                         <a:buNone/>
                       </a:pPr>
                       <a:r>
-                        <a:rPr lang="en-US" altLang="zh-TW" sz="1400"/>
+                        <a:rPr lang="en-US" altLang="zh-TW" sz="1400" dirty="0">
+                          <a:latin typeface="Times New Roman" panose="02020603050405020304" pitchFamily="18" charset="0"/>
+                          <a:cs typeface="Times New Roman" panose="02020603050405020304" pitchFamily="18" charset="0"/>
+                        </a:rPr>
                         <a:t>230</a:t>
                       </a:r>
                     </a:p>
@@ -10403,7 +10496,10 @@
                         <a:buNone/>
                       </a:pPr>
                       <a:r>
-                        <a:rPr lang="en-US" altLang="zh-TW" sz="1400" dirty="0"/>
+                        <a:rPr lang="en-US" altLang="zh-TW" sz="1400" dirty="0">
+                          <a:latin typeface="Times New Roman" panose="02020603050405020304" pitchFamily="18" charset="0"/>
+                          <a:cs typeface="Times New Roman" panose="02020603050405020304" pitchFamily="18" charset="0"/>
+                        </a:rPr>
                         <a:t>10.6</a:t>
                       </a:r>
                     </a:p>
@@ -10419,7 +10515,10 @@
                         <a:buNone/>
                       </a:pPr>
                       <a:r>
-                        <a:rPr lang="en-US" altLang="zh-TW" sz="1400" dirty="0"/>
+                        <a:rPr lang="en-US" altLang="zh-TW" sz="1400" dirty="0">
+                          <a:latin typeface="Times New Roman" panose="02020603050405020304" pitchFamily="18" charset="0"/>
+                          <a:cs typeface="Times New Roman" panose="02020603050405020304" pitchFamily="18" charset="0"/>
+                        </a:rPr>
                         <a:t>16.8</a:t>
                       </a:r>
                     </a:p>
@@ -10435,7 +10534,10 @@
                         <a:buNone/>
                       </a:pPr>
                       <a:r>
-                        <a:rPr lang="en-US" altLang="zh-TW" sz="1400" dirty="0"/>
+                        <a:rPr lang="en-US" altLang="zh-TW" sz="1400" dirty="0">
+                          <a:latin typeface="Times New Roman" panose="02020603050405020304" pitchFamily="18" charset="0"/>
+                          <a:cs typeface="Times New Roman" panose="02020603050405020304" pitchFamily="18" charset="0"/>
+                        </a:rPr>
                         <a:t>12.5</a:t>
                       </a:r>
                     </a:p>
@@ -10466,7 +10568,7 @@
         </p:nvSpPr>
         <p:spPr>
           <a:xfrm>
-            <a:off x="760166" y="14564331"/>
+            <a:off x="760166" y="15331253"/>
             <a:ext cx="6872155" cy="2893100"/>
           </a:xfrm>
           <a:prstGeom prst="rect">
@@ -10588,13 +10690,13 @@
           <p:nvPr>
             <p:extLst>
               <p:ext uri="{D42A27DB-BD31-4B8C-83A1-F6EECF244321}">
-                <p14:modId xmlns:p14="http://schemas.microsoft.com/office/powerpoint/2010/main" val="2916833234"/>
+                <p14:modId xmlns:p14="http://schemas.microsoft.com/office/powerpoint/2010/main" val="3984610557"/>
               </p:ext>
             </p:extLst>
           </p:nvPr>
         </p:nvGraphicFramePr>
         <p:xfrm>
-          <a:off x="2732797" y="17900666"/>
+          <a:off x="2732797" y="18667588"/>
           <a:ext cx="7912182" cy="914400"/>
         </p:xfrm>
         <a:graphic>
@@ -10604,28 +10706,28 @@
                 <a:tableStyleId>{5940675A-B579-460E-94D1-54222C63F5DA}</a:tableStyleId>
               </a:tblPr>
               <a:tblGrid>
-                <a:gridCol w="1318697">
+                <a:gridCol w="1972553">
                   <a:extLst>
                     <a:ext uri="{9D8B030D-6E8A-4147-A177-3AD203B41FA5}">
                       <a16:colId xmlns:a16="http://schemas.microsoft.com/office/drawing/2014/main" val="2437764609"/>
                     </a:ext>
                   </a:extLst>
                 </a:gridCol>
-                <a:gridCol w="1318697">
+                <a:gridCol w="1042307">
                   <a:extLst>
                     <a:ext uri="{9D8B030D-6E8A-4147-A177-3AD203B41FA5}">
                       <a16:colId xmlns:a16="http://schemas.microsoft.com/office/drawing/2014/main" val="3891642840"/>
                     </a:ext>
                   </a:extLst>
                 </a:gridCol>
-                <a:gridCol w="1318697">
+                <a:gridCol w="1091293">
                   <a:extLst>
                     <a:ext uri="{9D8B030D-6E8A-4147-A177-3AD203B41FA5}">
                       <a16:colId xmlns:a16="http://schemas.microsoft.com/office/drawing/2014/main" val="1213435560"/>
                     </a:ext>
                   </a:extLst>
                 </a:gridCol>
-                <a:gridCol w="1318697">
+                <a:gridCol w="1168635">
                   <a:extLst>
                     <a:ext uri="{9D8B030D-6E8A-4147-A177-3AD203B41FA5}">
                       <a16:colId xmlns:a16="http://schemas.microsoft.com/office/drawing/2014/main" val="3242861009"/>
@@ -10657,7 +10759,10 @@
                         <a:buNone/>
                       </a:pPr>
                       <a:r>
-                        <a:rPr lang="en-US" sz="1400" dirty="0"/>
+                        <a:rPr lang="en-US" sz="1400" dirty="0">
+                          <a:latin typeface="Times New Roman" panose="02020603050405020304" pitchFamily="18" charset="0"/>
+                          <a:cs typeface="Times New Roman" panose="02020603050405020304" pitchFamily="18" charset="0"/>
+                        </a:rPr>
                         <a:t>Scenario</a:t>
                       </a:r>
                     </a:p>
@@ -10673,7 +10778,10 @@
                         <a:buNone/>
                       </a:pPr>
                       <a:r>
-                        <a:rPr lang="en-US" sz="1400"/>
+                        <a:rPr lang="en-US" sz="1400">
+                          <a:latin typeface="Times New Roman" panose="02020603050405020304" pitchFamily="18" charset="0"/>
+                          <a:cs typeface="Times New Roman" panose="02020603050405020304" pitchFamily="18" charset="0"/>
+                        </a:rPr>
                         <a:t>UAVs</a:t>
                       </a:r>
                     </a:p>
@@ -10689,7 +10797,10 @@
                         <a:buNone/>
                       </a:pPr>
                       <a:r>
-                        <a:rPr lang="en-US" sz="1400" dirty="0"/>
+                        <a:rPr lang="en-US" sz="1400" dirty="0">
+                          <a:latin typeface="Times New Roman" panose="02020603050405020304" pitchFamily="18" charset="0"/>
+                          <a:cs typeface="Times New Roman" panose="02020603050405020304" pitchFamily="18" charset="0"/>
+                        </a:rPr>
                         <a:t>Sensors</a:t>
                       </a:r>
                     </a:p>
@@ -10705,7 +10816,10 @@
                         <a:buNone/>
                       </a:pPr>
                       <a:r>
-                        <a:rPr lang="en-US" sz="1400"/>
+                        <a:rPr lang="en-US" sz="1400" dirty="0">
+                          <a:latin typeface="Times New Roman" panose="02020603050405020304" pitchFamily="18" charset="0"/>
+                          <a:cs typeface="Times New Roman" panose="02020603050405020304" pitchFamily="18" charset="0"/>
+                        </a:rPr>
                         <a:t>Transfers</a:t>
                       </a:r>
                     </a:p>
@@ -10721,7 +10835,10 @@
                         <a:buNone/>
                       </a:pPr>
                       <a:r>
-                        <a:rPr lang="en-US" sz="1400"/>
+                        <a:rPr lang="en-US" sz="1400">
+                          <a:latin typeface="Times New Roman" panose="02020603050405020304" pitchFamily="18" charset="0"/>
+                          <a:cs typeface="Times New Roman" panose="02020603050405020304" pitchFamily="18" charset="0"/>
+                        </a:rPr>
                         <a:t>Completed</a:t>
                       </a:r>
                     </a:p>
@@ -10737,7 +10854,10 @@
                         <a:buNone/>
                       </a:pPr>
                       <a:r>
-                        <a:rPr lang="en-US" sz="1400"/>
+                        <a:rPr lang="en-US" sz="1400">
+                          <a:latin typeface="Times New Roman" panose="02020603050405020304" pitchFamily="18" charset="0"/>
+                          <a:cs typeface="Times New Roman" panose="02020603050405020304" pitchFamily="18" charset="0"/>
+                        </a:rPr>
                         <a:t>Deadline Met</a:t>
                       </a:r>
                     </a:p>
@@ -10760,7 +10880,10 @@
                         <a:buNone/>
                       </a:pPr>
                       <a:r>
-                        <a:rPr lang="en-US" sz="1400" dirty="0"/>
+                        <a:rPr lang="en-US" sz="1400" dirty="0">
+                          <a:latin typeface="Times New Roman" panose="02020603050405020304" pitchFamily="18" charset="0"/>
+                          <a:cs typeface="Times New Roman" panose="02020603050405020304" pitchFamily="18" charset="0"/>
+                        </a:rPr>
                         <a:t>Simple trace</a:t>
                       </a:r>
                     </a:p>
@@ -10776,7 +10899,10 @@
                         <a:buNone/>
                       </a:pPr>
                       <a:r>
-                        <a:rPr lang="en-US" altLang="zh-TW" sz="1400" dirty="0"/>
+                        <a:rPr lang="en-US" altLang="zh-TW" sz="1400" dirty="0">
+                          <a:latin typeface="Times New Roman" panose="02020603050405020304" pitchFamily="18" charset="0"/>
+                          <a:cs typeface="Times New Roman" panose="02020603050405020304" pitchFamily="18" charset="0"/>
+                        </a:rPr>
                         <a:t>3</a:t>
                       </a:r>
                     </a:p>
@@ -10792,7 +10918,10 @@
                         <a:buNone/>
                       </a:pPr>
                       <a:r>
-                        <a:rPr lang="en-US" altLang="zh-TW" sz="1400" dirty="0"/>
+                        <a:rPr lang="en-US" altLang="zh-TW" sz="1400" dirty="0">
+                          <a:latin typeface="Times New Roman" panose="02020603050405020304" pitchFamily="18" charset="0"/>
+                          <a:cs typeface="Times New Roman" panose="02020603050405020304" pitchFamily="18" charset="0"/>
+                        </a:rPr>
                         <a:t>50</a:t>
                       </a:r>
                     </a:p>
@@ -10808,7 +10937,10 @@
                         <a:buNone/>
                       </a:pPr>
                       <a:r>
-                        <a:rPr lang="en-US" altLang="zh-TW" sz="1400"/>
+                        <a:rPr lang="en-US" altLang="zh-TW" sz="1400" dirty="0">
+                          <a:latin typeface="Times New Roman" panose="02020603050405020304" pitchFamily="18" charset="0"/>
+                          <a:cs typeface="Times New Roman" panose="02020603050405020304" pitchFamily="18" charset="0"/>
+                        </a:rPr>
                         <a:t>79</a:t>
                       </a:r>
                     </a:p>
@@ -10824,7 +10956,10 @@
                         <a:buNone/>
                       </a:pPr>
                       <a:r>
-                        <a:rPr lang="en-US" altLang="zh-TW" sz="1400"/>
+                        <a:rPr lang="en-US" altLang="zh-TW" sz="1400">
+                          <a:latin typeface="Times New Roman" panose="02020603050405020304" pitchFamily="18" charset="0"/>
+                          <a:cs typeface="Times New Roman" panose="02020603050405020304" pitchFamily="18" charset="0"/>
+                        </a:rPr>
                         <a:t>79 / 79</a:t>
                       </a:r>
                     </a:p>
@@ -10840,7 +10975,10 @@
                         <a:buNone/>
                       </a:pPr>
                       <a:r>
-                        <a:rPr lang="en-US" sz="1400"/>
+                        <a:rPr lang="en-US" sz="1400">
+                          <a:latin typeface="Times New Roman" panose="02020603050405020304" pitchFamily="18" charset="0"/>
+                          <a:cs typeface="Times New Roman" panose="02020603050405020304" pitchFamily="18" charset="0"/>
+                        </a:rPr>
                         <a:t>Yes</a:t>
                       </a:r>
                     </a:p>
@@ -10863,10 +11001,16 @@
                         <a:buNone/>
                       </a:pPr>
                       <a:r>
-                        <a:rPr lang="en-US" altLang="zh-TW" sz="1400" dirty="0"/>
+                        <a:rPr lang="en-US" altLang="zh-TW" sz="1400" dirty="0">
+                          <a:latin typeface="Times New Roman" panose="02020603050405020304" pitchFamily="18" charset="0"/>
+                          <a:cs typeface="Times New Roman" panose="02020603050405020304" pitchFamily="18" charset="0"/>
+                        </a:rPr>
                         <a:t>Normal trace</a:t>
                       </a:r>
-                      <a:endParaRPr lang="en-US" sz="1400" dirty="0"/>
+                      <a:endParaRPr lang="en-US" sz="1400" dirty="0">
+                        <a:latin typeface="Times New Roman" panose="02020603050405020304" pitchFamily="18" charset="0"/>
+                        <a:cs typeface="Times New Roman" panose="02020603050405020304" pitchFamily="18" charset="0"/>
+                      </a:endParaRPr>
                     </a:p>
                   </a:txBody>
                   <a:tcPr anchor="ctr"/>
@@ -10880,7 +11024,10 @@
                         <a:buNone/>
                       </a:pPr>
                       <a:r>
-                        <a:rPr lang="en-US" altLang="zh-TW" sz="1400" dirty="0"/>
+                        <a:rPr lang="en-US" altLang="zh-TW" sz="1400" dirty="0">
+                          <a:latin typeface="Times New Roman" panose="02020603050405020304" pitchFamily="18" charset="0"/>
+                          <a:cs typeface="Times New Roman" panose="02020603050405020304" pitchFamily="18" charset="0"/>
+                        </a:rPr>
                         <a:t>5</a:t>
                       </a:r>
                     </a:p>
@@ -10896,7 +11043,10 @@
                         <a:buNone/>
                       </a:pPr>
                       <a:r>
-                        <a:rPr lang="en-US" altLang="zh-TW" sz="1400" dirty="0"/>
+                        <a:rPr lang="en-US" altLang="zh-TW" sz="1400" dirty="0">
+                          <a:latin typeface="Times New Roman" panose="02020603050405020304" pitchFamily="18" charset="0"/>
+                          <a:cs typeface="Times New Roman" panose="02020603050405020304" pitchFamily="18" charset="0"/>
+                        </a:rPr>
                         <a:t>500</a:t>
                       </a:r>
                     </a:p>
@@ -10912,7 +11062,10 @@
                         <a:buNone/>
                       </a:pPr>
                       <a:r>
-                        <a:rPr lang="en-US" altLang="zh-TW" sz="1400" dirty="0"/>
+                        <a:rPr lang="en-US" altLang="zh-TW" sz="1400" dirty="0">
+                          <a:latin typeface="Times New Roman" panose="02020603050405020304" pitchFamily="18" charset="0"/>
+                          <a:cs typeface="Times New Roman" panose="02020603050405020304" pitchFamily="18" charset="0"/>
+                        </a:rPr>
                         <a:t>212</a:t>
                       </a:r>
                     </a:p>
@@ -10928,7 +11081,10 @@
                         <a:buNone/>
                       </a:pPr>
                       <a:r>
-                        <a:rPr lang="en-US" altLang="zh-TW" sz="1400" dirty="0"/>
+                        <a:rPr lang="en-US" altLang="zh-TW" sz="1400" dirty="0">
+                          <a:latin typeface="Times New Roman" panose="02020603050405020304" pitchFamily="18" charset="0"/>
+                          <a:cs typeface="Times New Roman" panose="02020603050405020304" pitchFamily="18" charset="0"/>
+                        </a:rPr>
                         <a:t>212 / 212</a:t>
                       </a:r>
                     </a:p>
@@ -10944,7 +11100,10 @@
                         <a:buNone/>
                       </a:pPr>
                       <a:r>
-                        <a:rPr lang="en-US" sz="1400" dirty="0"/>
+                        <a:rPr lang="en-US" sz="1400" dirty="0">
+                          <a:latin typeface="Times New Roman" panose="02020603050405020304" pitchFamily="18" charset="0"/>
+                          <a:cs typeface="Times New Roman" panose="02020603050405020304" pitchFamily="18" charset="0"/>
+                        </a:rPr>
                         <a:t>Yes</a:t>
                       </a:r>
                     </a:p>
@@ -10977,7 +11136,7 @@
         </p:nvCxnSpPr>
         <p:spPr>
           <a:xfrm>
-            <a:off x="12867107" y="16888294"/>
+            <a:off x="12867107" y="17655216"/>
             <a:ext cx="4940296" cy="23306"/>
           </a:xfrm>
           <a:prstGeom prst="line">
@@ -11020,7 +11179,7 @@
         </p:nvCxnSpPr>
         <p:spPr>
           <a:xfrm flipH="1" flipV="1">
-            <a:off x="17798451" y="16911600"/>
+            <a:off x="17798451" y="17678522"/>
             <a:ext cx="8952" cy="482292"/>
           </a:xfrm>
           <a:prstGeom prst="line">
@@ -11063,7 +11222,7 @@
         </p:nvCxnSpPr>
         <p:spPr>
           <a:xfrm>
-            <a:off x="17798451" y="17393892"/>
+            <a:off x="17798451" y="18160814"/>
             <a:ext cx="301426" cy="0"/>
           </a:xfrm>
           <a:prstGeom prst="straightConnector1">
@@ -11105,7 +11264,7 @@
         </p:nvSpPr>
         <p:spPr>
           <a:xfrm>
-            <a:off x="504892" y="13792388"/>
+            <a:off x="504892" y="14559310"/>
             <a:ext cx="12367993" cy="5310685"/>
           </a:xfrm>
           <a:prstGeom prst="rect">
@@ -11161,7 +11320,7 @@
         </p:nvSpPr>
         <p:spPr>
           <a:xfrm>
-            <a:off x="623217" y="13922413"/>
+            <a:off x="623217" y="14689335"/>
             <a:ext cx="12367993" cy="615553"/>
           </a:xfrm>
           <a:prstGeom prst="rect">
@@ -11206,7 +11365,7 @@
         </p:nvSpPr>
         <p:spPr>
           <a:xfrm>
-            <a:off x="7058723" y="14570690"/>
+            <a:off x="7058723" y="15337612"/>
             <a:ext cx="5686592" cy="3293209"/>
           </a:xfrm>
           <a:prstGeom prst="rect">
